--- a/class/cloud_infra_mgmt/09주차_Terraform_IaC기초/01_강의자료/2차시_Terraform설치와HCL문법.pptx
+++ b/class/cloud_infra_mgmt/09주차_Terraform_IaC기초/01_강의자료/2차시_Terraform설치와HCL문법.pptx
@@ -9491,7 +9491,7 @@
               </a:lnSpc>
             </a:pPr>
             <a:r>
-              <a:rPr sz="1500" b="1">
+              <a:rPr sz="1700" b="1">
                 <a:solidFill>
                   <a:srgbClr val="0D9488"/>
                 </a:solidFill>
@@ -9500,7 +9500,7 @@
               <a:t>●  </a:t>
             </a:r>
             <a:r>
-              <a:rPr sz="1500" b="0">
+              <a:rPr sz="1700" b="0">
                 <a:solidFill>
                   <a:srgbClr val="222733"/>
                 </a:solidFill>
@@ -9516,7 +9516,7 @@
               </a:lnSpc>
             </a:pPr>
             <a:r>
-              <a:rPr sz="1500" b="1">
+              <a:rPr sz="1700" b="1">
                 <a:solidFill>
                   <a:srgbClr val="0D9488"/>
                 </a:solidFill>
@@ -9525,7 +9525,7 @@
               <a:t>●  </a:t>
             </a:r>
             <a:r>
-              <a:rPr sz="1500" b="0">
+              <a:rPr sz="1700" b="0">
                 <a:solidFill>
                   <a:srgbClr val="222733"/>
                 </a:solidFill>
@@ -9541,7 +9541,7 @@
               </a:lnSpc>
             </a:pPr>
             <a:r>
-              <a:rPr sz="1500" b="1">
+              <a:rPr sz="1700" b="1">
                 <a:solidFill>
                   <a:srgbClr val="0D9488"/>
                 </a:solidFill>
@@ -9550,7 +9550,7 @@
               <a:t>●  </a:t>
             </a:r>
             <a:r>
-              <a:rPr sz="1500" b="0">
+              <a:rPr sz="1700" b="0">
                 <a:solidFill>
                   <a:srgbClr val="222733"/>
                 </a:solidFill>

--- a/class/cloud_infra_mgmt/09주차_Terraform_IaC기초/01_강의자료/2차시_Terraform설치와HCL문법.pptx
+++ b/class/cloud_infra_mgmt/09주차_Terraform_IaC기초/01_강의자료/2차시_Terraform설치와HCL문법.pptx
@@ -5321,7 +5321,7 @@
           <a:p>
             <a:pPr>
               <a:lnSpc>
-                <a:spcPct val="115000"/>
+                <a:spcPct val="149500"/>
               </a:lnSpc>
             </a:pPr>
             <a:r>
@@ -5346,7 +5346,7 @@
           <a:p>
             <a:pPr>
               <a:lnSpc>
-                <a:spcPct val="115000"/>
+                <a:spcPct val="149500"/>
               </a:lnSpc>
             </a:pPr>
             <a:r>
@@ -5371,7 +5371,7 @@
           <a:p>
             <a:pPr>
               <a:lnSpc>
-                <a:spcPct val="115000"/>
+                <a:spcPct val="149500"/>
               </a:lnSpc>
             </a:pPr>
             <a:r>
@@ -5762,7 +5762,7 @@
           <a:p>
             <a:pPr>
               <a:lnSpc>
-                <a:spcPct val="115000"/>
+                <a:spcPct val="149500"/>
               </a:lnSpc>
             </a:pPr>
             <a:r>
@@ -5787,7 +5787,7 @@
           <a:p>
             <a:pPr>
               <a:lnSpc>
-                <a:spcPct val="115000"/>
+                <a:spcPct val="149500"/>
               </a:lnSpc>
             </a:pPr>
             <a:r>
@@ -5812,7 +5812,7 @@
           <a:p>
             <a:pPr>
               <a:lnSpc>
-                <a:spcPct val="115000"/>
+                <a:spcPct val="149500"/>
               </a:lnSpc>
             </a:pPr>
             <a:r>
@@ -5837,13 +5837,13 @@
           <a:p>
             <a:pPr>
               <a:lnSpc>
-                <a:spcPct val="115000"/>
+                <a:spcPct val="149500"/>
               </a:lnSpc>
             </a:pPr>
             <a:r>
               <a:rPr sz="1700" b="1">
                 <a:solidFill>
-                  <a:srgbClr val="0D9488"/>
+                  <a:srgbClr val="DC2626"/>
                 </a:solidFill>
                 <a:latin typeface="맑은 고딕"/>
               </a:rPr>
@@ -5856,7 +5856,7 @@
                 </a:solidFill>
                 <a:latin typeface="맑은 고딕"/>
               </a:rPr>
-              <a:t>⚠ 컨테이너를 지금 지우지 마세요 — 다음 3차시에 destroy 실습으로 이어집니다</a:t>
+              <a:t>컨테이너를 지금 지우지 마세요 — 다음 3차시에 destroy 실습으로 이어집니다</a:t>
             </a:r>
           </a:p>
         </p:txBody>
@@ -7174,16 +7174,104 @@
       </p:sp>
       <p:sp>
         <p:nvSpPr>
-          <p:cNvPr id="7" name="Isosceles Triangle 6"/>
+          <p:cNvPr id="7" name="Rectangle 6"/>
           <p:cNvSpPr/>
           <p:nvPr/>
         </p:nvSpPr>
         <p:spPr>
-          <a:xfrm rot="5400000">
-            <a:off x="3495751" y="1673352"/>
-            <a:ext cx="146304" cy="146304"/>
-          </a:xfrm>
-          <a:prstGeom prst="triangle">
+          <a:xfrm>
+            <a:off x="5096865" y="1730959"/>
+            <a:ext cx="1995220" cy="31089"/>
+          </a:xfrm>
+          <a:prstGeom prst="rect">
+            <a:avLst/>
+          </a:prstGeom>
+          <a:solidFill>
+            <a:srgbClr val="14B8A6"/>
+          </a:solidFill>
+          <a:ln>
+            <a:noFill/>
+          </a:ln>
+          <a:effectLst/>
+        </p:spPr>
+        <p:style>
+          <a:lnRef idx="1">
+            <a:schemeClr val="accent1"/>
+          </a:lnRef>
+          <a:fillRef idx="3">
+            <a:schemeClr val="accent1"/>
+          </a:fillRef>
+          <a:effectRef idx="2">
+            <a:schemeClr val="accent1"/>
+          </a:effectRef>
+          <a:fontRef idx="minor">
+            <a:schemeClr val="lt1"/>
+          </a:fontRef>
+        </p:style>
+        <p:txBody>
+          <a:bodyPr rtlCol="0" anchor="ctr"/>
+          <a:lstStyle/>
+          <a:p>
+            <a:pPr algn="ctr"/>
+          </a:p>
+        </p:txBody>
+      </p:sp>
+      <p:sp>
+        <p:nvSpPr>
+          <p:cNvPr id="8" name="Rectangle 7"/>
+          <p:cNvSpPr/>
+          <p:nvPr/>
+        </p:nvSpPr>
+        <p:spPr>
+          <a:xfrm>
+            <a:off x="7622438" y="1730959"/>
+            <a:ext cx="1995220" cy="31089"/>
+          </a:xfrm>
+          <a:prstGeom prst="rect">
+            <a:avLst/>
+          </a:prstGeom>
+          <a:solidFill>
+            <a:srgbClr val="14B8A6"/>
+          </a:solidFill>
+          <a:ln>
+            <a:noFill/>
+          </a:ln>
+          <a:effectLst/>
+        </p:spPr>
+        <p:style>
+          <a:lnRef idx="1">
+            <a:schemeClr val="accent1"/>
+          </a:lnRef>
+          <a:fillRef idx="3">
+            <a:schemeClr val="accent1"/>
+          </a:fillRef>
+          <a:effectRef idx="2">
+            <a:schemeClr val="accent1"/>
+          </a:effectRef>
+          <a:fontRef idx="minor">
+            <a:schemeClr val="lt1"/>
+          </a:fontRef>
+        </p:style>
+        <p:txBody>
+          <a:bodyPr rtlCol="0" anchor="ctr"/>
+          <a:lstStyle/>
+          <a:p>
+            <a:pPr algn="ctr"/>
+          </a:p>
+        </p:txBody>
+      </p:sp>
+      <p:sp>
+        <p:nvSpPr>
+          <p:cNvPr id="9" name="Oval 8"/>
+          <p:cNvSpPr/>
+          <p:nvPr/>
+        </p:nvSpPr>
+        <p:spPr>
+          <a:xfrm>
+            <a:off x="2040940" y="1481328"/>
+            <a:ext cx="530352" cy="530352"/>
+          </a:xfrm>
+          <a:prstGeom prst="ellipse">
             <a:avLst/>
           </a:prstGeom>
           <a:solidFill>
@@ -7218,227 +7306,7 @@
       </p:sp>
       <p:sp>
         <p:nvSpPr>
-          <p:cNvPr id="8" name="Rectangle 7"/>
-          <p:cNvSpPr/>
-          <p:nvPr/>
-        </p:nvSpPr>
-        <p:spPr>
-          <a:xfrm>
-            <a:off x="5096865" y="1730959"/>
-            <a:ext cx="1995220" cy="31089"/>
-          </a:xfrm>
-          <a:prstGeom prst="rect">
-            <a:avLst/>
-          </a:prstGeom>
-          <a:solidFill>
-            <a:srgbClr val="14B8A6"/>
-          </a:solidFill>
-          <a:ln>
-            <a:noFill/>
-          </a:ln>
-          <a:effectLst/>
-        </p:spPr>
-        <p:style>
-          <a:lnRef idx="1">
-            <a:schemeClr val="accent1"/>
-          </a:lnRef>
-          <a:fillRef idx="3">
-            <a:schemeClr val="accent1"/>
-          </a:fillRef>
-          <a:effectRef idx="2">
-            <a:schemeClr val="accent1"/>
-          </a:effectRef>
-          <a:fontRef idx="minor">
-            <a:schemeClr val="lt1"/>
-          </a:fontRef>
-        </p:style>
-        <p:txBody>
-          <a:bodyPr rtlCol="0" anchor="ctr"/>
-          <a:lstStyle/>
-          <a:p>
-            <a:pPr algn="ctr"/>
-          </a:p>
-        </p:txBody>
-      </p:sp>
-      <p:sp>
-        <p:nvSpPr>
-          <p:cNvPr id="9" name="Isosceles Triangle 8"/>
-          <p:cNvSpPr/>
-          <p:nvPr/>
-        </p:nvSpPr>
-        <p:spPr>
-          <a:xfrm rot="5400000">
-            <a:off x="6021324" y="1673352"/>
-            <a:ext cx="146304" cy="146304"/>
-          </a:xfrm>
-          <a:prstGeom prst="triangle">
-            <a:avLst/>
-          </a:prstGeom>
-          <a:solidFill>
-            <a:srgbClr val="0D9488"/>
-          </a:solidFill>
-          <a:ln>
-            <a:noFill/>
-          </a:ln>
-          <a:effectLst/>
-        </p:spPr>
-        <p:style>
-          <a:lnRef idx="1">
-            <a:schemeClr val="accent1"/>
-          </a:lnRef>
-          <a:fillRef idx="3">
-            <a:schemeClr val="accent1"/>
-          </a:fillRef>
-          <a:effectRef idx="2">
-            <a:schemeClr val="accent1"/>
-          </a:effectRef>
-          <a:fontRef idx="minor">
-            <a:schemeClr val="lt1"/>
-          </a:fontRef>
-        </p:style>
-        <p:txBody>
-          <a:bodyPr rtlCol="0" anchor="ctr"/>
-          <a:lstStyle/>
-          <a:p>
-            <a:pPr algn="ctr"/>
-          </a:p>
-        </p:txBody>
-      </p:sp>
-      <p:sp>
-        <p:nvSpPr>
-          <p:cNvPr id="10" name="Rectangle 9"/>
-          <p:cNvSpPr/>
-          <p:nvPr/>
-        </p:nvSpPr>
-        <p:spPr>
-          <a:xfrm>
-            <a:off x="7622438" y="1730959"/>
-            <a:ext cx="1995220" cy="31089"/>
-          </a:xfrm>
-          <a:prstGeom prst="rect">
-            <a:avLst/>
-          </a:prstGeom>
-          <a:solidFill>
-            <a:srgbClr val="14B8A6"/>
-          </a:solidFill>
-          <a:ln>
-            <a:noFill/>
-          </a:ln>
-          <a:effectLst/>
-        </p:spPr>
-        <p:style>
-          <a:lnRef idx="1">
-            <a:schemeClr val="accent1"/>
-          </a:lnRef>
-          <a:fillRef idx="3">
-            <a:schemeClr val="accent1"/>
-          </a:fillRef>
-          <a:effectRef idx="2">
-            <a:schemeClr val="accent1"/>
-          </a:effectRef>
-          <a:fontRef idx="minor">
-            <a:schemeClr val="lt1"/>
-          </a:fontRef>
-        </p:style>
-        <p:txBody>
-          <a:bodyPr rtlCol="0" anchor="ctr"/>
-          <a:lstStyle/>
-          <a:p>
-            <a:pPr algn="ctr"/>
-          </a:p>
-        </p:txBody>
-      </p:sp>
-      <p:sp>
-        <p:nvSpPr>
-          <p:cNvPr id="11" name="Isosceles Triangle 10"/>
-          <p:cNvSpPr/>
-          <p:nvPr/>
-        </p:nvSpPr>
-        <p:spPr>
-          <a:xfrm rot="5400000">
-            <a:off x="8546896" y="1673352"/>
-            <a:ext cx="146304" cy="146304"/>
-          </a:xfrm>
-          <a:prstGeom prst="triangle">
-            <a:avLst/>
-          </a:prstGeom>
-          <a:solidFill>
-            <a:srgbClr val="0D9488"/>
-          </a:solidFill>
-          <a:ln>
-            <a:noFill/>
-          </a:ln>
-          <a:effectLst/>
-        </p:spPr>
-        <p:style>
-          <a:lnRef idx="1">
-            <a:schemeClr val="accent1"/>
-          </a:lnRef>
-          <a:fillRef idx="3">
-            <a:schemeClr val="accent1"/>
-          </a:fillRef>
-          <a:effectRef idx="2">
-            <a:schemeClr val="accent1"/>
-          </a:effectRef>
-          <a:fontRef idx="minor">
-            <a:schemeClr val="lt1"/>
-          </a:fontRef>
-        </p:style>
-        <p:txBody>
-          <a:bodyPr rtlCol="0" anchor="ctr"/>
-          <a:lstStyle/>
-          <a:p>
-            <a:pPr algn="ctr"/>
-          </a:p>
-        </p:txBody>
-      </p:sp>
-      <p:sp>
-        <p:nvSpPr>
-          <p:cNvPr id="12" name="Oval 11"/>
-          <p:cNvSpPr/>
-          <p:nvPr/>
-        </p:nvSpPr>
-        <p:spPr>
-          <a:xfrm>
-            <a:off x="2040940" y="1481328"/>
-            <a:ext cx="530352" cy="530352"/>
-          </a:xfrm>
-          <a:prstGeom prst="ellipse">
-            <a:avLst/>
-          </a:prstGeom>
-          <a:solidFill>
-            <a:srgbClr val="0D9488"/>
-          </a:solidFill>
-          <a:ln>
-            <a:noFill/>
-          </a:ln>
-          <a:effectLst/>
-        </p:spPr>
-        <p:style>
-          <a:lnRef idx="1">
-            <a:schemeClr val="accent1"/>
-          </a:lnRef>
-          <a:fillRef idx="3">
-            <a:schemeClr val="accent1"/>
-          </a:fillRef>
-          <a:effectRef idx="2">
-            <a:schemeClr val="accent1"/>
-          </a:effectRef>
-          <a:fontRef idx="minor">
-            <a:schemeClr val="lt1"/>
-          </a:fontRef>
-        </p:style>
-        <p:txBody>
-          <a:bodyPr rtlCol="0" anchor="ctr"/>
-          <a:lstStyle/>
-          <a:p>
-            <a:pPr algn="ctr"/>
-          </a:p>
-        </p:txBody>
-      </p:sp>
-      <p:sp>
-        <p:nvSpPr>
-          <p:cNvPr id="13" name="TextBox 12"/>
+          <p:cNvPr id="10" name="TextBox 9"/>
           <p:cNvSpPr txBox="1"/>
           <p:nvPr/>
         </p:nvSpPr>
@@ -7473,7 +7341,7 @@
       </p:sp>
       <p:sp>
         <p:nvSpPr>
-          <p:cNvPr id="14" name="Rounded Rectangle 13"/>
+          <p:cNvPr id="11" name="Rounded Rectangle 10"/>
           <p:cNvSpPr/>
           <p:nvPr/>
         </p:nvSpPr>
@@ -7521,7 +7389,7 @@
       </p:sp>
       <p:sp>
         <p:nvSpPr>
-          <p:cNvPr id="15" name="TextBox 14"/>
+          <p:cNvPr id="12" name="TextBox 11"/>
           <p:cNvSpPr txBox="1"/>
           <p:nvPr/>
         </p:nvSpPr>
@@ -7556,7 +7424,7 @@
       </p:sp>
       <p:sp>
         <p:nvSpPr>
-          <p:cNvPr id="16" name="TextBox 15"/>
+          <p:cNvPr id="13" name="TextBox 12"/>
           <p:cNvSpPr txBox="1"/>
           <p:nvPr/>
         </p:nvSpPr>
@@ -7595,7 +7463,7 @@
       </p:sp>
       <p:sp>
         <p:nvSpPr>
-          <p:cNvPr id="17" name="Oval 16"/>
+          <p:cNvPr id="14" name="Oval 13"/>
           <p:cNvSpPr/>
           <p:nvPr/>
         </p:nvSpPr>
@@ -7639,7 +7507,7 @@
       </p:sp>
       <p:sp>
         <p:nvSpPr>
-          <p:cNvPr id="18" name="TextBox 17"/>
+          <p:cNvPr id="15" name="TextBox 14"/>
           <p:cNvSpPr txBox="1"/>
           <p:nvPr/>
         </p:nvSpPr>
@@ -7674,7 +7542,7 @@
       </p:sp>
       <p:sp>
         <p:nvSpPr>
-          <p:cNvPr id="19" name="Rounded Rectangle 18"/>
+          <p:cNvPr id="16" name="Rounded Rectangle 15"/>
           <p:cNvSpPr/>
           <p:nvPr/>
         </p:nvSpPr>
@@ -7722,7 +7590,7 @@
       </p:sp>
       <p:sp>
         <p:nvSpPr>
-          <p:cNvPr id="20" name="TextBox 19"/>
+          <p:cNvPr id="17" name="TextBox 16"/>
           <p:cNvSpPr txBox="1"/>
           <p:nvPr/>
         </p:nvSpPr>
@@ -7757,7 +7625,7 @@
       </p:sp>
       <p:sp>
         <p:nvSpPr>
-          <p:cNvPr id="21" name="TextBox 20"/>
+          <p:cNvPr id="18" name="TextBox 17"/>
           <p:cNvSpPr txBox="1"/>
           <p:nvPr/>
         </p:nvSpPr>
@@ -7796,7 +7664,7 @@
       </p:sp>
       <p:sp>
         <p:nvSpPr>
-          <p:cNvPr id="22" name="Oval 21"/>
+          <p:cNvPr id="19" name="Oval 18"/>
           <p:cNvSpPr/>
           <p:nvPr/>
         </p:nvSpPr>
@@ -7840,7 +7708,7 @@
       </p:sp>
       <p:sp>
         <p:nvSpPr>
-          <p:cNvPr id="23" name="TextBox 22"/>
+          <p:cNvPr id="20" name="TextBox 19"/>
           <p:cNvSpPr txBox="1"/>
           <p:nvPr/>
         </p:nvSpPr>
@@ -7875,7 +7743,7 @@
       </p:sp>
       <p:sp>
         <p:nvSpPr>
-          <p:cNvPr id="24" name="Rounded Rectangle 23"/>
+          <p:cNvPr id="21" name="Rounded Rectangle 20"/>
           <p:cNvSpPr/>
           <p:nvPr/>
         </p:nvSpPr>
@@ -7923,7 +7791,7 @@
       </p:sp>
       <p:sp>
         <p:nvSpPr>
-          <p:cNvPr id="25" name="TextBox 24"/>
+          <p:cNvPr id="22" name="TextBox 21"/>
           <p:cNvSpPr txBox="1"/>
           <p:nvPr/>
         </p:nvSpPr>
@@ -7958,7 +7826,7 @@
       </p:sp>
       <p:sp>
         <p:nvSpPr>
-          <p:cNvPr id="26" name="TextBox 25"/>
+          <p:cNvPr id="23" name="TextBox 22"/>
           <p:cNvSpPr txBox="1"/>
           <p:nvPr/>
         </p:nvSpPr>
@@ -7997,7 +7865,7 @@
       </p:sp>
       <p:sp>
         <p:nvSpPr>
-          <p:cNvPr id="27" name="Oval 26"/>
+          <p:cNvPr id="24" name="Oval 23"/>
           <p:cNvSpPr/>
           <p:nvPr/>
         </p:nvSpPr>
@@ -8041,7 +7909,7 @@
       </p:sp>
       <p:sp>
         <p:nvSpPr>
-          <p:cNvPr id="28" name="TextBox 27"/>
+          <p:cNvPr id="25" name="TextBox 24"/>
           <p:cNvSpPr txBox="1"/>
           <p:nvPr/>
         </p:nvSpPr>
@@ -8076,7 +7944,7 @@
       </p:sp>
       <p:sp>
         <p:nvSpPr>
-          <p:cNvPr id="29" name="Rounded Rectangle 28"/>
+          <p:cNvPr id="26" name="Rounded Rectangle 25"/>
           <p:cNvSpPr/>
           <p:nvPr/>
         </p:nvSpPr>
@@ -8124,7 +7992,7 @@
       </p:sp>
       <p:sp>
         <p:nvSpPr>
-          <p:cNvPr id="30" name="TextBox 29"/>
+          <p:cNvPr id="27" name="TextBox 26"/>
           <p:cNvSpPr txBox="1"/>
           <p:nvPr/>
         </p:nvSpPr>
@@ -8159,7 +8027,7 @@
       </p:sp>
       <p:sp>
         <p:nvSpPr>
-          <p:cNvPr id="31" name="TextBox 30"/>
+          <p:cNvPr id="28" name="TextBox 27"/>
           <p:cNvSpPr txBox="1"/>
           <p:nvPr/>
         </p:nvSpPr>
@@ -8198,7 +8066,7 @@
       </p:sp>
       <p:sp>
         <p:nvSpPr>
-          <p:cNvPr id="32" name="TextBox 31"/>
+          <p:cNvPr id="29" name="TextBox 28"/>
           <p:cNvSpPr txBox="1"/>
           <p:nvPr/>
         </p:nvSpPr>
@@ -8233,7 +8101,7 @@
       </p:sp>
       <p:sp>
         <p:nvSpPr>
-          <p:cNvPr id="33" name="TextBox 32"/>
+          <p:cNvPr id="30" name="TextBox 29"/>
           <p:cNvSpPr txBox="1"/>
           <p:nvPr/>
         </p:nvSpPr>
@@ -8268,7 +8136,7 @@
       </p:sp>
       <p:sp>
         <p:nvSpPr>
-          <p:cNvPr id="34" name="Rectangle 33"/>
+          <p:cNvPr id="31" name="Rectangle 30"/>
           <p:cNvSpPr/>
           <p:nvPr/>
         </p:nvSpPr>
@@ -8792,7 +8660,7 @@
           <a:p>
             <a:pPr>
               <a:lnSpc>
-                <a:spcPct val="115000"/>
+                <a:spcPct val="149500"/>
               </a:lnSpc>
             </a:pPr>
             <a:r>
@@ -8817,7 +8685,7 @@
           <a:p>
             <a:pPr>
               <a:lnSpc>
-                <a:spcPct val="115000"/>
+                <a:spcPct val="149500"/>
               </a:lnSpc>
             </a:pPr>
             <a:r>
@@ -8842,7 +8710,7 @@
           <a:p>
             <a:pPr>
               <a:lnSpc>
-                <a:spcPct val="115000"/>
+                <a:spcPct val="149500"/>
               </a:lnSpc>
             </a:pPr>
             <a:r>
@@ -8867,7 +8735,7 @@
           <a:p>
             <a:pPr>
               <a:lnSpc>
-                <a:spcPct val="115000"/>
+                <a:spcPct val="149500"/>
               </a:lnSpc>
             </a:pPr>
             <a:r>
@@ -9487,7 +9355,7 @@
           <a:p>
             <a:pPr>
               <a:lnSpc>
-                <a:spcPct val="115000"/>
+                <a:spcPct val="149500"/>
               </a:lnSpc>
             </a:pPr>
             <a:r>
@@ -9512,7 +9380,7 @@
           <a:p>
             <a:pPr>
               <a:lnSpc>
-                <a:spcPct val="115000"/>
+                <a:spcPct val="149500"/>
               </a:lnSpc>
             </a:pPr>
             <a:r>
@@ -9537,7 +9405,7 @@
           <a:p>
             <a:pPr>
               <a:lnSpc>
-                <a:spcPct val="115000"/>
+                <a:spcPct val="149500"/>
               </a:lnSpc>
             </a:pPr>
             <a:r>
@@ -10121,7 +9989,7 @@
           <a:p>
             <a:pPr>
               <a:lnSpc>
-                <a:spcPct val="115000"/>
+                <a:spcPct val="149500"/>
               </a:lnSpc>
             </a:pPr>
             <a:r>
@@ -10146,7 +10014,7 @@
           <a:p>
             <a:pPr>
               <a:lnSpc>
-                <a:spcPct val="115000"/>
+                <a:spcPct val="149500"/>
               </a:lnSpc>
             </a:pPr>
             <a:r>
@@ -10171,7 +10039,7 @@
           <a:p>
             <a:pPr>
               <a:lnSpc>
-                <a:spcPct val="115000"/>
+                <a:spcPct val="149500"/>
               </a:lnSpc>
             </a:pPr>
             <a:r>
@@ -10196,7 +10064,7 @@
           <a:p>
             <a:pPr>
               <a:lnSpc>
-                <a:spcPct val="115000"/>
+                <a:spcPct val="149500"/>
               </a:lnSpc>
             </a:pPr>
             <a:r>
@@ -10221,7 +10089,7 @@
           <a:p>
             <a:pPr>
               <a:lnSpc>
-                <a:spcPct val="115000"/>
+                <a:spcPct val="149500"/>
               </a:lnSpc>
             </a:pPr>
             <a:r>
@@ -10246,7 +10114,7 @@
           <a:p>
             <a:pPr>
               <a:lnSpc>
-                <a:spcPct val="115000"/>
+                <a:spcPct val="149500"/>
               </a:lnSpc>
             </a:pPr>
             <a:r>
@@ -10637,7 +10505,7 @@
           <a:p>
             <a:pPr>
               <a:lnSpc>
-                <a:spcPct val="115000"/>
+                <a:spcPct val="149500"/>
               </a:lnSpc>
             </a:pPr>
             <a:r>
@@ -10662,7 +10530,7 @@
           <a:p>
             <a:pPr>
               <a:lnSpc>
-                <a:spcPct val="115000"/>
+                <a:spcPct val="149500"/>
               </a:lnSpc>
             </a:pPr>
             <a:r>
@@ -10687,7 +10555,7 @@
           <a:p>
             <a:pPr>
               <a:lnSpc>
-                <a:spcPct val="115000"/>
+                <a:spcPct val="149500"/>
               </a:lnSpc>
             </a:pPr>
             <a:r>
@@ -10712,7 +10580,7 @@
           <a:p>
             <a:pPr>
               <a:lnSpc>
-                <a:spcPct val="115000"/>
+                <a:spcPct val="149500"/>
               </a:lnSpc>
             </a:pPr>
             <a:r>

--- a/class/cloud_infra_mgmt/09주차_Terraform_IaC기초/01_강의자료/2차시_Terraform설치와HCL문법.pptx
+++ b/class/cloud_infra_mgmt/09주차_Terraform_IaC기초/01_강의자료/2차시_Terraform설치와HCL문법.pptx
@@ -4957,6 +4957,8 @@
                   <a:srgbClr val="14B8A6"/>
                 </a:solidFill>
                 <a:latin typeface="맑은 고딕"/>
+                <a:ea typeface="맑은 고딕"/>
+                <a:cs typeface="맑은 고딕"/>
               </a:rPr>
               <a:t>클라우드인프라관리  ·  9주차 2차시</a:t>
             </a:r>
@@ -4992,6 +4994,8 @@
                   <a:srgbClr val="FFFFFF"/>
                 </a:solidFill>
                 <a:latin typeface="맑은 고딕"/>
+                <a:ea typeface="맑은 고딕"/>
+                <a:cs typeface="맑은 고딕"/>
               </a:rPr>
               <a:t>Terraform 설치와 HCL 문법</a:t>
             </a:r>
@@ -5027,6 +5031,8 @@
                   <a:srgbClr val="C9D3E6"/>
                 </a:solidFill>
                 <a:latin typeface="맑은 고딕"/>
+                <a:ea typeface="맑은 고딕"/>
+                <a:cs typeface="맑은 고딕"/>
               </a:rPr>
               <a:t>install → init → plan → apply</a:t>
             </a:r>
@@ -5062,6 +5068,8 @@
                   <a:srgbClr val="FFFFFF"/>
                 </a:solidFill>
                 <a:latin typeface="맑은 고딕"/>
+                <a:ea typeface="맑은 고딕"/>
+                <a:cs typeface="맑은 고딕"/>
               </a:rPr>
               <a:t>영남이공대학교 김지윤교수</a:t>
             </a:r>
@@ -5221,6 +5229,8 @@
                   <a:srgbClr val="14213D"/>
                 </a:solidFill>
                 <a:latin typeface="맑은 고딕"/>
+                <a:ea typeface="맑은 고딕"/>
+                <a:cs typeface="맑은 고딕"/>
               </a:rPr>
               <a:t>03</a:t>
             </a:r>
@@ -5256,6 +5266,8 @@
                   <a:srgbClr val="14B8A6"/>
                 </a:solidFill>
                 <a:latin typeface="맑은 고딕"/>
+                <a:ea typeface="맑은 고딕"/>
+                <a:cs typeface="맑은 고딕"/>
               </a:rPr>
               <a:t>실습 안내</a:t>
             </a:r>
@@ -5291,6 +5303,8 @@
                   <a:srgbClr val="FFFFFF"/>
                 </a:solidFill>
                 <a:latin typeface="맑은 고딕"/>
+                <a:ea typeface="맑은 고딕"/>
+                <a:cs typeface="맑은 고딕"/>
               </a:rPr>
               <a:t>Killercoda — HCL 문법 빈칸 채우기</a:t>
             </a:r>
@@ -5330,6 +5344,8 @@
                   <a:srgbClr val="0D9488"/>
                 </a:solidFill>
                 <a:latin typeface="맑은 고딕"/>
+                <a:ea typeface="맑은 고딕"/>
+                <a:cs typeface="맑은 고딕"/>
               </a:rPr>
               <a:t>●  </a:t>
             </a:r>
@@ -5339,6 +5355,8 @@
                   <a:srgbClr val="222733"/>
                 </a:solidFill>
                 <a:latin typeface="맑은 고딕"/>
+                <a:ea typeface="맑은 고딕"/>
+                <a:cs typeface="맑은 고딕"/>
               </a:rPr>
               <a:t>뼈대만 있는 main.tf에서 provider·resource 블록의 빈칸을 채워 완성</a:t>
             </a:r>
@@ -5355,6 +5373,8 @@
                   <a:srgbClr val="0D9488"/>
                 </a:solidFill>
                 <a:latin typeface="맑은 고딕"/>
+                <a:ea typeface="맑은 고딕"/>
+                <a:cs typeface="맑은 고딕"/>
               </a:rPr>
               <a:t>●  </a:t>
             </a:r>
@@ -5364,6 +5384,8 @@
                   <a:srgbClr val="222733"/>
                 </a:solidFill>
                 <a:latin typeface="맑은 고딕"/>
+                <a:ea typeface="맑은 고딕"/>
+                <a:cs typeface="맑은 고딕"/>
               </a:rPr>
               <a:t>terraform init → plan → apply로 실행 결과 확인</a:t>
             </a:r>
@@ -5380,6 +5402,8 @@
                   <a:srgbClr val="0D9488"/>
                 </a:solidFill>
                 <a:latin typeface="맑은 고딕"/>
+                <a:ea typeface="맑은 고딕"/>
+                <a:cs typeface="맑은 고딕"/>
               </a:rPr>
               <a:t>●  </a:t>
             </a:r>
@@ -5389,6 +5413,8 @@
                   <a:srgbClr val="222733"/>
                 </a:solidFill>
                 <a:latin typeface="맑은 고딕"/>
+                <a:ea typeface="맑은 고딕"/>
+                <a:cs typeface="맑은 고딕"/>
               </a:rPr>
               <a:t>완성한 코드가 어떤 리소스를 만드는지 스스로 설명해보기</a:t>
             </a:r>
@@ -5424,6 +5450,8 @@
                   <a:srgbClr val="5B6373"/>
                 </a:solidFill>
                 <a:latin typeface="맑은 고딕"/>
+                <a:ea typeface="맑은 고딕"/>
+                <a:cs typeface="맑은 고딕"/>
               </a:rPr>
               <a:t>클라우드인프라관리  ·  9주차 2차시</a:t>
             </a:r>
@@ -5459,6 +5487,8 @@
                   <a:srgbClr val="5B6373"/>
                 </a:solidFill>
                 <a:latin typeface="맑은 고딕"/>
+                <a:ea typeface="맑은 고딕"/>
+                <a:cs typeface="맑은 고딕"/>
               </a:rPr>
               <a:t>10 / 13</a:t>
             </a:r>
@@ -5662,6 +5692,8 @@
                   <a:srgbClr val="14213D"/>
                 </a:solidFill>
                 <a:latin typeface="맑은 고딕"/>
+                <a:ea typeface="맑은 고딕"/>
+                <a:cs typeface="맑은 고딕"/>
               </a:rPr>
               <a:t>03</a:t>
             </a:r>
@@ -5697,6 +5729,8 @@
                   <a:srgbClr val="14B8A6"/>
                 </a:solidFill>
                 <a:latin typeface="맑은 고딕"/>
+                <a:ea typeface="맑은 고딕"/>
+                <a:cs typeface="맑은 고딕"/>
               </a:rPr>
               <a:t>실습 안내</a:t>
             </a:r>
@@ -5732,6 +5766,8 @@
                   <a:srgbClr val="FFFFFF"/>
                 </a:solidFill>
                 <a:latin typeface="맑은 고딕"/>
+                <a:ea typeface="맑은 고딕"/>
+                <a:cs typeface="맑은 고딕"/>
               </a:rPr>
               <a:t>VM 안내 — 설치 + Docker Provider 배포</a:t>
             </a:r>
@@ -5771,6 +5807,8 @@
                   <a:srgbClr val="0D9488"/>
                 </a:solidFill>
                 <a:latin typeface="맑은 고딕"/>
+                <a:ea typeface="맑은 고딕"/>
+                <a:cs typeface="맑은 고딕"/>
               </a:rPr>
               <a:t>●  </a:t>
             </a:r>
@@ -5780,6 +5818,8 @@
                   <a:srgbClr val="222733"/>
                 </a:solidFill>
                 <a:latin typeface="맑은 고딕"/>
+                <a:ea typeface="맑은 고딕"/>
+                <a:cs typeface="맑은 고딕"/>
               </a:rPr>
               <a:t>개인 VM에서 Terraform 설치 명령어 그대로 실행 (04_템플릿코드에 스크립트 제공)</a:t>
             </a:r>
@@ -5796,6 +5836,8 @@
                   <a:srgbClr val="0D9488"/>
                 </a:solidFill>
                 <a:latin typeface="맑은 고딕"/>
+                <a:ea typeface="맑은 고딕"/>
+                <a:cs typeface="맑은 고딕"/>
               </a:rPr>
               <a:t>●  </a:t>
             </a:r>
@@ -5805,6 +5847,8 @@
                   <a:srgbClr val="222733"/>
                 </a:solidFill>
                 <a:latin typeface="맑은 고딕"/>
+                <a:ea typeface="맑은 고딕"/>
+                <a:cs typeface="맑은 고딕"/>
               </a:rPr>
               <a:t>main.tf 작성(docker_container 리소스) 후 init → plan → apply -auto-approve</a:t>
             </a:r>
@@ -5821,6 +5865,8 @@
                   <a:srgbClr val="0D9488"/>
                 </a:solidFill>
                 <a:latin typeface="맑은 고딕"/>
+                <a:ea typeface="맑은 고딕"/>
+                <a:cs typeface="맑은 고딕"/>
               </a:rPr>
               <a:t>●  </a:t>
             </a:r>
@@ -5830,6 +5876,8 @@
                   <a:srgbClr val="222733"/>
                 </a:solidFill>
                 <a:latin typeface="맑은 고딕"/>
+                <a:ea typeface="맑은 고딕"/>
+                <a:cs typeface="맑은 고딕"/>
               </a:rPr>
               <a:t>docker ps로 tf-nginx 컨테이너 확인 화면 캡처</a:t>
             </a:r>
@@ -5846,6 +5894,8 @@
                   <a:srgbClr val="DC2626"/>
                 </a:solidFill>
                 <a:latin typeface="맑은 고딕"/>
+                <a:ea typeface="맑은 고딕"/>
+                <a:cs typeface="맑은 고딕"/>
               </a:rPr>
               <a:t>●  </a:t>
             </a:r>
@@ -5855,6 +5905,8 @@
                   <a:srgbClr val="222733"/>
                 </a:solidFill>
                 <a:latin typeface="맑은 고딕"/>
+                <a:ea typeface="맑은 고딕"/>
+                <a:cs typeface="맑은 고딕"/>
               </a:rPr>
               <a:t>컨테이너를 지금 지우지 마세요 — 다음 3차시에 destroy 실습으로 이어집니다</a:t>
             </a:r>
@@ -5890,6 +5942,8 @@
                   <a:srgbClr val="5B6373"/>
                 </a:solidFill>
                 <a:latin typeface="맑은 고딕"/>
+                <a:ea typeface="맑은 고딕"/>
+                <a:cs typeface="맑은 고딕"/>
               </a:rPr>
               <a:t>클라우드인프라관리  ·  9주차 2차시</a:t>
             </a:r>
@@ -5925,6 +5979,8 @@
                   <a:srgbClr val="5B6373"/>
                 </a:solidFill>
                 <a:latin typeface="맑은 고딕"/>
+                <a:ea typeface="맑은 고딕"/>
+                <a:cs typeface="맑은 고딕"/>
               </a:rPr>
               <a:t>11 / 13</a:t>
             </a:r>
@@ -6110,6 +6166,8 @@
                   <a:srgbClr val="FFFFFF"/>
                 </a:solidFill>
                 <a:latin typeface="맑은 고딕"/>
+                <a:ea typeface="맑은 고딕"/>
+                <a:cs typeface="맑은 고딕"/>
               </a:rPr>
               <a:t>오늘의 정리</a:t>
             </a:r>
@@ -6163,6 +6221,8 @@
                   <a:srgbClr val="14213D"/>
                 </a:solidFill>
                 <a:latin typeface="맑은 고딕"/>
+                <a:ea typeface="맑은 고딕"/>
+                <a:cs typeface="맑은 고딕"/>
               </a:rPr>
               <a:t>1</a:t>
             </a:r>
@@ -6198,6 +6258,8 @@
                   <a:srgbClr val="FFFFFF"/>
                 </a:solidFill>
                 <a:latin typeface="맑은 고딕"/>
+                <a:ea typeface="맑은 고딕"/>
+                <a:cs typeface="맑은 고딕"/>
               </a:rPr>
               <a:t>Terraform은 HashiCorp 공식 apt 저장소로 설치한다</a:t>
             </a:r>
@@ -6251,6 +6313,8 @@
                   <a:srgbClr val="14213D"/>
                 </a:solidFill>
                 <a:latin typeface="맑은 고딕"/>
+                <a:ea typeface="맑은 고딕"/>
+                <a:cs typeface="맑은 고딕"/>
               </a:rPr>
               <a:t>2</a:t>
             </a:r>
@@ -6286,6 +6350,8 @@
                   <a:srgbClr val="FFFFFF"/>
                 </a:solidFill>
                 <a:latin typeface="맑은 고딕"/>
+                <a:ea typeface="맑은 고딕"/>
+                <a:cs typeface="맑은 고딕"/>
               </a:rPr>
               <a:t>HCL은 provider(무엇을 다룰지)와 resource(무엇을 만들지) 블록으로 인프라를 선언한다</a:t>
             </a:r>
@@ -6339,6 +6405,8 @@
                   <a:srgbClr val="14213D"/>
                 </a:solidFill>
                 <a:latin typeface="맑은 고딕"/>
+                <a:ea typeface="맑은 고딕"/>
+                <a:cs typeface="맑은 고딕"/>
               </a:rPr>
               <a:t>3</a:t>
             </a:r>
@@ -6374,6 +6442,8 @@
                   <a:srgbClr val="FFFFFF"/>
                 </a:solidFill>
                 <a:latin typeface="맑은 고딕"/>
+                <a:ea typeface="맑은 고딕"/>
+                <a:cs typeface="맑은 고딕"/>
               </a:rPr>
               <a:t>init → plan → apply 순서로 코드를 실제 인프라로 만든다</a:t>
             </a:r>
@@ -6515,6 +6585,8 @@
                   <a:srgbClr val="FFFFFF"/>
                 </a:solidFill>
                 <a:latin typeface="맑은 고딕"/>
+                <a:ea typeface="맑은 고딕"/>
+                <a:cs typeface="맑은 고딕"/>
               </a:rPr>
               <a:t>다음 차시 예고</a:t>
             </a:r>
@@ -6550,6 +6622,8 @@
                   <a:srgbClr val="14B8A6"/>
                 </a:solidFill>
                 <a:latin typeface="맑은 고딕"/>
+                <a:ea typeface="맑은 고딕"/>
+                <a:cs typeface="맑은 고딕"/>
               </a:rPr>
               <a:t>다음 차시 예고 — 9주차 3차시</a:t>
             </a:r>
@@ -6585,6 +6659,8 @@
                   <a:srgbClr val="FFFFFF"/>
                 </a:solidFill>
                 <a:latin typeface="맑은 고딕"/>
+                <a:ea typeface="맑은 고딕"/>
+                <a:cs typeface="맑은 고딕"/>
               </a:rPr>
               <a:t>오늘 만든 컨테이너를 destroy로 제거하고, Terraform이 인프라 상태를 어떻게 기억하는지(State 파일)를 살펴봅니다.</a:t>
             </a:r>
@@ -6726,6 +6802,8 @@
                   <a:srgbClr val="14B8A6"/>
                 </a:solidFill>
                 <a:latin typeface="맑은 고딕"/>
+                <a:ea typeface="맑은 고딕"/>
+                <a:cs typeface="맑은 고딕"/>
               </a:rPr>
               <a:t>SESSION OVERVIEW</a:t>
             </a:r>
@@ -6761,6 +6839,8 @@
                   <a:srgbClr val="FFFFFF"/>
                 </a:solidFill>
                 <a:latin typeface="맑은 고딕"/>
+                <a:ea typeface="맑은 고딕"/>
+                <a:cs typeface="맑은 고딕"/>
               </a:rPr>
               <a:t>오늘의 학습 목표</a:t>
             </a:r>
@@ -6800,6 +6880,8 @@
                   <a:srgbClr val="222733"/>
                 </a:solidFill>
                 <a:latin typeface="맑은 고딕"/>
+                <a:ea typeface="맑은 고딕"/>
+                <a:cs typeface="맑은 고딕"/>
               </a:rPr>
               <a:t>1.  개인 VM에 Terraform을 직접 설치한다</a:t>
             </a:r>
@@ -6816,6 +6898,8 @@
                   <a:srgbClr val="222733"/>
                 </a:solidFill>
                 <a:latin typeface="맑은 고딕"/>
+                <a:ea typeface="맑은 고딕"/>
+                <a:cs typeface="맑은 고딕"/>
               </a:rPr>
               <a:t>2.  HCL의 기본 문법 구조(provider·resource)를 이해한다</a:t>
             </a:r>
@@ -6832,6 +6916,8 @@
                   <a:srgbClr val="222733"/>
                 </a:solidFill>
                 <a:latin typeface="맑은 고딕"/>
+                <a:ea typeface="맑은 고딕"/>
+                <a:cs typeface="맑은 고딕"/>
               </a:rPr>
               <a:t>3.  init/plan/apply로 실제 Docker 컨테이너를 코드로 배포한다</a:t>
             </a:r>
@@ -6867,6 +6953,8 @@
                   <a:srgbClr val="5B6373"/>
                 </a:solidFill>
                 <a:latin typeface="맑은 고딕"/>
+                <a:ea typeface="맑은 고딕"/>
+                <a:cs typeface="맑은 고딕"/>
               </a:rPr>
               <a:t>클라우드인프라관리  ·  9주차 2차시</a:t>
             </a:r>
@@ -6902,6 +6990,8 @@
                   <a:srgbClr val="5B6373"/>
                 </a:solidFill>
                 <a:latin typeface="맑은 고딕"/>
+                <a:ea typeface="맑은 고딕"/>
+                <a:cs typeface="맑은 고딕"/>
               </a:rPr>
               <a:t>02 / 13</a:t>
             </a:r>
@@ -7087,6 +7177,8 @@
                   <a:srgbClr val="14B8A6"/>
                 </a:solidFill>
                 <a:latin typeface="맑은 고딕"/>
+                <a:ea typeface="맑은 고딕"/>
+                <a:cs typeface="맑은 고딕"/>
               </a:rPr>
               <a:t>SESSION OVERVIEW</a:t>
             </a:r>
@@ -7122,6 +7214,8 @@
                   <a:srgbClr val="FFFFFF"/>
                 </a:solidFill>
                 <a:latin typeface="맑은 고딕"/>
+                <a:ea typeface="맑은 고딕"/>
+                <a:cs typeface="맑은 고딕"/>
               </a:rPr>
               <a:t>오늘의 진행 순서</a:t>
             </a:r>
@@ -7333,6 +7427,8 @@
                   <a:srgbClr val="FFFFFF"/>
                 </a:solidFill>
                 <a:latin typeface="맑은 고딕"/>
+                <a:ea typeface="맑은 고딕"/>
+                <a:cs typeface="맑은 고딕"/>
               </a:rPr>
               <a:t>1</a:t>
             </a:r>
@@ -7416,6 +7512,8 @@
                   <a:srgbClr val="14213D"/>
                 </a:solidFill>
                 <a:latin typeface="맑은 고딕"/>
+                <a:ea typeface="맑은 고딕"/>
+                <a:cs typeface="맑은 고딕"/>
               </a:rPr>
               <a:t>개념 설명</a:t>
             </a:r>
@@ -7455,6 +7553,8 @@
                   <a:srgbClr val="222733"/>
                 </a:solidFill>
                 <a:latin typeface="맑은 고딕"/>
+                <a:ea typeface="맑은 고딕"/>
+                <a:cs typeface="맑은 고딕"/>
               </a:rPr>
               <a:t>강의자료 기반 직접 강의</a:t>
             </a:r>
@@ -7534,6 +7634,8 @@
                   <a:srgbClr val="FFFFFF"/>
                 </a:solidFill>
                 <a:latin typeface="맑은 고딕"/>
+                <a:ea typeface="맑은 고딕"/>
+                <a:cs typeface="맑은 고딕"/>
               </a:rPr>
               <a:t>2</a:t>
             </a:r>
@@ -7617,6 +7719,8 @@
                   <a:srgbClr val="14213D"/>
                 </a:solidFill>
                 <a:latin typeface="맑은 고딕"/>
+                <a:ea typeface="맑은 고딕"/>
+                <a:cs typeface="맑은 고딕"/>
               </a:rPr>
               <a:t>Killercoda</a:t>
             </a:r>
@@ -7656,6 +7760,8 @@
                   <a:srgbClr val="222733"/>
                 </a:solidFill>
                 <a:latin typeface="맑은 고딕"/>
+                <a:ea typeface="맑은 고딕"/>
+                <a:cs typeface="맑은 고딕"/>
               </a:rPr>
               <a:t>HCL 문법 빈칸 채우기</a:t>
             </a:r>
@@ -7735,6 +7841,8 @@
                   <a:srgbClr val="FFFFFF"/>
                 </a:solidFill>
                 <a:latin typeface="맑은 고딕"/>
+                <a:ea typeface="맑은 고딕"/>
+                <a:cs typeface="맑은 고딕"/>
               </a:rPr>
               <a:t>3</a:t>
             </a:r>
@@ -7818,6 +7926,8 @@
                   <a:srgbClr val="14213D"/>
                 </a:solidFill>
                 <a:latin typeface="맑은 고딕"/>
+                <a:ea typeface="맑은 고딕"/>
+                <a:cs typeface="맑은 고딕"/>
               </a:rPr>
               <a:t>VM 안내</a:t>
             </a:r>
@@ -7857,6 +7967,8 @@
                   <a:srgbClr val="222733"/>
                 </a:solidFill>
                 <a:latin typeface="맑은 고딕"/>
+                <a:ea typeface="맑은 고딕"/>
+                <a:cs typeface="맑은 고딕"/>
               </a:rPr>
               <a:t>설치+배포 실습</a:t>
             </a:r>
@@ -7936,6 +8048,8 @@
                   <a:srgbClr val="FFFFFF"/>
                 </a:solidFill>
                 <a:latin typeface="맑은 고딕"/>
+                <a:ea typeface="맑은 고딕"/>
+                <a:cs typeface="맑은 고딕"/>
               </a:rPr>
               <a:t>4</a:t>
             </a:r>
@@ -8019,6 +8133,8 @@
                   <a:srgbClr val="14213D"/>
                 </a:solidFill>
                 <a:latin typeface="맑은 고딕"/>
+                <a:ea typeface="맑은 고딕"/>
+                <a:cs typeface="맑은 고딕"/>
               </a:rPr>
               <a:t>결과 제출</a:t>
             </a:r>
@@ -8058,6 +8174,8 @@
                   <a:srgbClr val="222733"/>
                 </a:solidFill>
                 <a:latin typeface="맑은 고딕"/>
+                <a:ea typeface="맑은 고딕"/>
+                <a:cs typeface="맑은 고딕"/>
               </a:rPr>
               <a:t>체크리스트 제출</a:t>
             </a:r>
@@ -8093,6 +8211,8 @@
                   <a:srgbClr val="5B6373"/>
                 </a:solidFill>
                 <a:latin typeface="맑은 고딕"/>
+                <a:ea typeface="맑은 고딕"/>
+                <a:cs typeface="맑은 고딕"/>
               </a:rPr>
               <a:t>클라우드인프라관리  ·  9주차 2차시</a:t>
             </a:r>
@@ -8128,6 +8248,8 @@
                   <a:srgbClr val="5B6373"/>
                 </a:solidFill>
                 <a:latin typeface="맑은 고딕"/>
+                <a:ea typeface="맑은 고딕"/>
+                <a:cs typeface="맑은 고딕"/>
               </a:rPr>
               <a:t>03 / 13</a:t>
             </a:r>
@@ -8331,6 +8453,8 @@
                   <a:srgbClr val="14213D"/>
                 </a:solidFill>
                 <a:latin typeface="맑은 고딕"/>
+                <a:ea typeface="맑은 고딕"/>
+                <a:cs typeface="맑은 고딕"/>
               </a:rPr>
               <a:t>PART 01</a:t>
             </a:r>
@@ -8366,6 +8490,8 @@
                   <a:srgbClr val="FFFFFF"/>
                 </a:solidFill>
                 <a:latin typeface="맑은 고딕"/>
+                <a:ea typeface="맑은 고딕"/>
+                <a:cs typeface="맑은 고딕"/>
               </a:rPr>
               <a:t>Terraform 설치</a:t>
             </a:r>
@@ -8401,6 +8527,8 @@
                   <a:srgbClr val="C9D3E6"/>
                 </a:solidFill>
                 <a:latin typeface="맑은 고딕"/>
+                <a:ea typeface="맑은 고딕"/>
+                <a:cs typeface="맑은 고딕"/>
               </a:rPr>
               <a:t>공식 HashiCorp 저장소로 설치한다</a:t>
             </a:r>
@@ -8560,6 +8688,8 @@
                   <a:srgbClr val="14213D"/>
                 </a:solidFill>
                 <a:latin typeface="맑은 고딕"/>
+                <a:ea typeface="맑은 고딕"/>
+                <a:cs typeface="맑은 고딕"/>
               </a:rPr>
               <a:t>01</a:t>
             </a:r>
@@ -8595,6 +8725,8 @@
                   <a:srgbClr val="14B8A6"/>
                 </a:solidFill>
                 <a:latin typeface="맑은 고딕"/>
+                <a:ea typeface="맑은 고딕"/>
+                <a:cs typeface="맑은 고딕"/>
               </a:rPr>
               <a:t>PART 1 · Terraform 설치</a:t>
             </a:r>
@@ -8630,6 +8762,8 @@
                   <a:srgbClr val="FFFFFF"/>
                 </a:solidFill>
                 <a:latin typeface="맑은 고딕"/>
+                <a:ea typeface="맑은 고딕"/>
+                <a:cs typeface="맑은 고딕"/>
               </a:rPr>
               <a:t>apt 저장소 등록 후 설치</a:t>
             </a:r>
@@ -8669,6 +8803,8 @@
                   <a:srgbClr val="0D9488"/>
                 </a:solidFill>
                 <a:latin typeface="맑은 고딕"/>
+                <a:ea typeface="맑은 고딕"/>
+                <a:cs typeface="맑은 고딕"/>
               </a:rPr>
               <a:t>●  </a:t>
             </a:r>
@@ -8678,6 +8814,8 @@
                   <a:srgbClr val="222733"/>
                 </a:solidFill>
                 <a:latin typeface="맑은 고딕"/>
+                <a:ea typeface="맑은 고딕"/>
+                <a:cs typeface="맑은 고딕"/>
               </a:rPr>
               <a:t>HashiCorp 공식 GPG 키 등록 → apt 저장소 목록에 추가 → apt install</a:t>
             </a:r>
@@ -8694,6 +8832,8 @@
                   <a:srgbClr val="0D9488"/>
                 </a:solidFill>
                 <a:latin typeface="맑은 고딕"/>
+                <a:ea typeface="맑은 고딕"/>
+                <a:cs typeface="맑은 고딕"/>
               </a:rPr>
               <a:t>●  </a:t>
             </a:r>
@@ -8703,6 +8843,8 @@
                   <a:srgbClr val="222733"/>
                 </a:solidFill>
                 <a:latin typeface="맑은 고딕"/>
+                <a:ea typeface="맑은 고딕"/>
+                <a:cs typeface="맑은 고딕"/>
               </a:rPr>
               <a:t>wget -O- https://apt.releases.hashicorp.com/gpg | sudo gpg --dearmor -o /usr/share/keyrings/hashicorp-archive-keyring.gpg</a:t>
             </a:r>
@@ -8719,6 +8861,8 @@
                   <a:srgbClr val="0D9488"/>
                 </a:solidFill>
                 <a:latin typeface="맑은 고딕"/>
+                <a:ea typeface="맑은 고딕"/>
+                <a:cs typeface="맑은 고딕"/>
               </a:rPr>
               <a:t>●  </a:t>
             </a:r>
@@ -8728,6 +8872,8 @@
                   <a:srgbClr val="222733"/>
                 </a:solidFill>
                 <a:latin typeface="맑은 고딕"/>
+                <a:ea typeface="맑은 고딕"/>
+                <a:cs typeface="맑은 고딕"/>
               </a:rPr>
               <a:t>sudo apt-get update &amp;&amp; sudo apt-get install -y terraform</a:t>
             </a:r>
@@ -8744,6 +8890,8 @@
                   <a:srgbClr val="0D9488"/>
                 </a:solidFill>
                 <a:latin typeface="맑은 고딕"/>
+                <a:ea typeface="맑은 고딕"/>
+                <a:cs typeface="맑은 고딕"/>
               </a:rPr>
               <a:t>●  </a:t>
             </a:r>
@@ -8753,6 +8901,8 @@
                   <a:srgbClr val="222733"/>
                 </a:solidFill>
                 <a:latin typeface="맑은 고딕"/>
+                <a:ea typeface="맑은 고딕"/>
+                <a:cs typeface="맑은 고딕"/>
               </a:rPr>
               <a:t>terraform -version 으로 설치 확인</a:t>
             </a:r>
@@ -8788,6 +8938,8 @@
                   <a:srgbClr val="5B6373"/>
                 </a:solidFill>
                 <a:latin typeface="맑은 고딕"/>
+                <a:ea typeface="맑은 고딕"/>
+                <a:cs typeface="맑은 고딕"/>
               </a:rPr>
               <a:t>클라우드인프라관리  ·  9주차 2차시</a:t>
             </a:r>
@@ -8823,6 +8975,8 @@
                   <a:srgbClr val="5B6373"/>
                 </a:solidFill>
                 <a:latin typeface="맑은 고딕"/>
+                <a:ea typeface="맑은 고딕"/>
+                <a:cs typeface="맑은 고딕"/>
               </a:rPr>
               <a:t>05 / 13</a:t>
             </a:r>
@@ -9026,6 +9180,8 @@
                   <a:srgbClr val="14213D"/>
                 </a:solidFill>
                 <a:latin typeface="맑은 고딕"/>
+                <a:ea typeface="맑은 고딕"/>
+                <a:cs typeface="맑은 고딕"/>
               </a:rPr>
               <a:t>PART 02</a:t>
             </a:r>
@@ -9061,6 +9217,8 @@
                   <a:srgbClr val="FFFFFF"/>
                 </a:solidFill>
                 <a:latin typeface="맑은 고딕"/>
+                <a:ea typeface="맑은 고딕"/>
+                <a:cs typeface="맑은 고딕"/>
               </a:rPr>
               <a:t>HCL 문법</a:t>
             </a:r>
@@ -9096,6 +9254,8 @@
                   <a:srgbClr val="C9D3E6"/>
                 </a:solidFill>
                 <a:latin typeface="맑은 고딕"/>
+                <a:ea typeface="맑은 고딕"/>
+                <a:cs typeface="맑은 고딕"/>
               </a:rPr>
               <a:t>선언형 언어로 인프라를 기술한다</a:t>
             </a:r>
@@ -9255,6 +9415,8 @@
                   <a:srgbClr val="14213D"/>
                 </a:solidFill>
                 <a:latin typeface="맑은 고딕"/>
+                <a:ea typeface="맑은 고딕"/>
+                <a:cs typeface="맑은 고딕"/>
               </a:rPr>
               <a:t>02</a:t>
             </a:r>
@@ -9290,6 +9452,8 @@
                   <a:srgbClr val="14B8A6"/>
                 </a:solidFill>
                 <a:latin typeface="맑은 고딕"/>
+                <a:ea typeface="맑은 고딕"/>
+                <a:cs typeface="맑은 고딕"/>
               </a:rPr>
               <a:t>PART 2 · HCL 문법</a:t>
             </a:r>
@@ -9325,6 +9489,8 @@
                   <a:srgbClr val="FFFFFF"/>
                 </a:solidFill>
                 <a:latin typeface="맑은 고딕"/>
+                <a:ea typeface="맑은 고딕"/>
+                <a:cs typeface="맑은 고딕"/>
               </a:rPr>
               <a:t>HCL 코드의 두 가지 핵심 블록</a:t>
             </a:r>
@@ -9364,6 +9530,8 @@
                   <a:srgbClr val="0D9488"/>
                 </a:solidFill>
                 <a:latin typeface="맑은 고딕"/>
+                <a:ea typeface="맑은 고딕"/>
+                <a:cs typeface="맑은 고딕"/>
               </a:rPr>
               <a:t>●  </a:t>
             </a:r>
@@ -9373,6 +9541,8 @@
                   <a:srgbClr val="222733"/>
                 </a:solidFill>
                 <a:latin typeface="맑은 고딕"/>
+                <a:ea typeface="맑은 고딕"/>
+                <a:cs typeface="맑은 고딕"/>
               </a:rPr>
               <a:t>provider — 어떤 인프라(Docker, AWS 등)를 다룰지 선언하는 블록</a:t>
             </a:r>
@@ -9389,6 +9559,8 @@
                   <a:srgbClr val="0D9488"/>
                 </a:solidFill>
                 <a:latin typeface="맑은 고딕"/>
+                <a:ea typeface="맑은 고딕"/>
+                <a:cs typeface="맑은 고딕"/>
               </a:rPr>
               <a:t>●  </a:t>
             </a:r>
@@ -9398,6 +9570,8 @@
                   <a:srgbClr val="222733"/>
                 </a:solidFill>
                 <a:latin typeface="맑은 고딕"/>
+                <a:ea typeface="맑은 고딕"/>
+                <a:cs typeface="맑은 고딕"/>
               </a:rPr>
               <a:t>resource — 실제로 만들고 싶은 대상(컨테이너, 서버 등)을 선언하는 블록</a:t>
             </a:r>
@@ -9414,6 +9588,8 @@
                   <a:srgbClr val="0D9488"/>
                 </a:solidFill>
                 <a:latin typeface="맑은 고딕"/>
+                <a:ea typeface="맑은 고딕"/>
+                <a:cs typeface="맑은 고딕"/>
               </a:rPr>
               <a:t>●  </a:t>
             </a:r>
@@ -9423,6 +9599,8 @@
                   <a:srgbClr val="222733"/>
                 </a:solidFill>
                 <a:latin typeface="맑은 고딕"/>
+                <a:ea typeface="맑은 고딕"/>
+                <a:cs typeface="맑은 고딕"/>
               </a:rPr>
               <a:t>resource는 "타입" "이름" { 속성들 } 형태로 작성</a:t>
             </a:r>
@@ -9458,6 +9636,8 @@
                   <a:srgbClr val="14213D"/>
                 </a:solidFill>
                 <a:latin typeface="맑은 고딕"/>
+                <a:ea typeface="맑은 고딕"/>
+                <a:cs typeface="맑은 고딕"/>
               </a:rPr>
               <a:t>HCL 기본 구조</a:t>
             </a:r>
@@ -9537,6 +9717,8 @@
                   <a:srgbClr val="FFFFFF"/>
                 </a:solidFill>
                 <a:latin typeface="맑은 고딕"/>
+                <a:ea typeface="맑은 고딕"/>
+                <a:cs typeface="맑은 고딕"/>
               </a:rPr>
               <a:t>provider "docker" {}</a:t>
             </a:r>
@@ -9616,6 +9798,8 @@
                   <a:srgbClr val="FFFFFF"/>
                 </a:solidFill>
                 <a:latin typeface="맑은 고딕"/>
+                <a:ea typeface="맑은 고딕"/>
+                <a:cs typeface="맑은 고딕"/>
               </a:rPr>
               <a:t>resource "docker_container" "web" { ... }</a:t>
             </a:r>
@@ -9651,6 +9835,8 @@
                   <a:srgbClr val="5B6373"/>
                 </a:solidFill>
                 <a:latin typeface="맑은 고딕"/>
+                <a:ea typeface="맑은 고딕"/>
+                <a:cs typeface="맑은 고딕"/>
               </a:rPr>
               <a:t>클라우드인프라관리  ·  9주차 2차시</a:t>
             </a:r>
@@ -9686,6 +9872,8 @@
                   <a:srgbClr val="5B6373"/>
                 </a:solidFill>
                 <a:latin typeface="맑은 고딕"/>
+                <a:ea typeface="맑은 고딕"/>
+                <a:cs typeface="맑은 고딕"/>
               </a:rPr>
               <a:t>07 / 13</a:t>
             </a:r>
@@ -9889,6 +10077,8 @@
                   <a:srgbClr val="14213D"/>
                 </a:solidFill>
                 <a:latin typeface="맑은 고딕"/>
+                <a:ea typeface="맑은 고딕"/>
+                <a:cs typeface="맑은 고딕"/>
               </a:rPr>
               <a:t>02</a:t>
             </a:r>
@@ -9924,6 +10114,8 @@
                   <a:srgbClr val="14B8A6"/>
                 </a:solidFill>
                 <a:latin typeface="맑은 고딕"/>
+                <a:ea typeface="맑은 고딕"/>
+                <a:cs typeface="맑은 고딕"/>
               </a:rPr>
               <a:t>PART 2 · HCL 문법</a:t>
             </a:r>
@@ -9959,6 +10151,8 @@
                   <a:srgbClr val="FFFFFF"/>
                 </a:solidFill>
                 <a:latin typeface="맑은 고딕"/>
+                <a:ea typeface="맑은 고딕"/>
+                <a:cs typeface="맑은 고딕"/>
               </a:rPr>
               <a:t>main.tf 예시 — Docker 컨테이너 선언</a:t>
             </a:r>
@@ -9998,6 +10192,8 @@
                   <a:srgbClr val="0D9488"/>
                 </a:solidFill>
                 <a:latin typeface="맑은 고딕"/>
+                <a:ea typeface="맑은 고딕"/>
+                <a:cs typeface="맑은 고딕"/>
               </a:rPr>
               <a:t>●  </a:t>
             </a:r>
@@ -10007,6 +10203,8 @@
                   <a:srgbClr val="222733"/>
                 </a:solidFill>
                 <a:latin typeface="맑은 고딕"/>
+                <a:ea typeface="맑은 고딕"/>
+                <a:cs typeface="맑은 고딕"/>
               </a:rPr>
               <a:t>resource "docker_container" "web" {</a:t>
             </a:r>
@@ -10023,6 +10221,8 @@
                   <a:srgbClr val="0D9488"/>
                 </a:solidFill>
                 <a:latin typeface="맑은 고딕"/>
+                <a:ea typeface="맑은 고딕"/>
+                <a:cs typeface="맑은 고딕"/>
               </a:rPr>
               <a:t>●  </a:t>
             </a:r>
@@ -10032,6 +10232,8 @@
                   <a:srgbClr val="222733"/>
                 </a:solidFill>
                 <a:latin typeface="맑은 고딕"/>
+                <a:ea typeface="맑은 고딕"/>
+                <a:cs typeface="맑은 고딕"/>
               </a:rPr>
               <a:t>  name  = "tf-nginx"</a:t>
             </a:r>
@@ -10048,6 +10250,8 @@
                   <a:srgbClr val="0D9488"/>
                 </a:solidFill>
                 <a:latin typeface="맑은 고딕"/>
+                <a:ea typeface="맑은 고딕"/>
+                <a:cs typeface="맑은 고딕"/>
               </a:rPr>
               <a:t>●  </a:t>
             </a:r>
@@ -10057,6 +10261,8 @@
                   <a:srgbClr val="222733"/>
                 </a:solidFill>
                 <a:latin typeface="맑은 고딕"/>
+                <a:ea typeface="맑은 고딕"/>
+                <a:cs typeface="맑은 고딕"/>
               </a:rPr>
               <a:t>  image = "nginx:latest"</a:t>
             </a:r>
@@ -10073,6 +10279,8 @@
                   <a:srgbClr val="0D9488"/>
                 </a:solidFill>
                 <a:latin typeface="맑은 고딕"/>
+                <a:ea typeface="맑은 고딕"/>
+                <a:cs typeface="맑은 고딕"/>
               </a:rPr>
               <a:t>●  </a:t>
             </a:r>
@@ -10082,6 +10290,8 @@
                   <a:srgbClr val="222733"/>
                 </a:solidFill>
                 <a:latin typeface="맑은 고딕"/>
+                <a:ea typeface="맑은 고딕"/>
+                <a:cs typeface="맑은 고딕"/>
               </a:rPr>
               <a:t>  ports { internal = 80; external = 8080 }</a:t>
             </a:r>
@@ -10098,6 +10308,8 @@
                   <a:srgbClr val="0D9488"/>
                 </a:solidFill>
                 <a:latin typeface="맑은 고딕"/>
+                <a:ea typeface="맑은 고딕"/>
+                <a:cs typeface="맑은 고딕"/>
               </a:rPr>
               <a:t>●  </a:t>
             </a:r>
@@ -10107,6 +10319,8 @@
                   <a:srgbClr val="222733"/>
                 </a:solidFill>
                 <a:latin typeface="맑은 고딕"/>
+                <a:ea typeface="맑은 고딕"/>
+                <a:cs typeface="맑은 고딕"/>
               </a:rPr>
               <a:t>}</a:t>
             </a:r>
@@ -10123,6 +10337,8 @@
                   <a:srgbClr val="0D9488"/>
                 </a:solidFill>
                 <a:latin typeface="맑은 고딕"/>
+                <a:ea typeface="맑은 고딕"/>
+                <a:cs typeface="맑은 고딕"/>
               </a:rPr>
               <a:t>●  </a:t>
             </a:r>
@@ -10132,6 +10348,8 @@
                   <a:srgbClr val="222733"/>
                 </a:solidFill>
                 <a:latin typeface="맑은 고딕"/>
+                <a:ea typeface="맑은 고딕"/>
+                <a:cs typeface="맑은 고딕"/>
               </a:rPr>
               <a:t>→ 이 코드가 실행되면 nginx 컨테이너 하나가 8080 포트로 생성됨</a:t>
             </a:r>
@@ -10167,6 +10385,8 @@
                   <a:srgbClr val="5B6373"/>
                 </a:solidFill>
                 <a:latin typeface="맑은 고딕"/>
+                <a:ea typeface="맑은 고딕"/>
+                <a:cs typeface="맑은 고딕"/>
               </a:rPr>
               <a:t>클라우드인프라관리  ·  9주차 2차시</a:t>
             </a:r>
@@ -10202,6 +10422,8 @@
                   <a:srgbClr val="5B6373"/>
                 </a:solidFill>
                 <a:latin typeface="맑은 고딕"/>
+                <a:ea typeface="맑은 고딕"/>
+                <a:cs typeface="맑은 고딕"/>
               </a:rPr>
               <a:t>08 / 13</a:t>
             </a:r>
@@ -10405,6 +10627,8 @@
                   <a:srgbClr val="14213D"/>
                 </a:solidFill>
                 <a:latin typeface="맑은 고딕"/>
+                <a:ea typeface="맑은 고딕"/>
+                <a:cs typeface="맑은 고딕"/>
               </a:rPr>
               <a:t>02</a:t>
             </a:r>
@@ -10440,6 +10664,8 @@
                   <a:srgbClr val="14B8A6"/>
                 </a:solidFill>
                 <a:latin typeface="맑은 고딕"/>
+                <a:ea typeface="맑은 고딕"/>
+                <a:cs typeface="맑은 고딕"/>
               </a:rPr>
               <a:t>PART 2 · HCL 문법</a:t>
             </a:r>
@@ -10475,6 +10701,8 @@
                   <a:srgbClr val="FFFFFF"/>
                 </a:solidFill>
                 <a:latin typeface="맑은 고딕"/>
+                <a:ea typeface="맑은 고딕"/>
+                <a:cs typeface="맑은 고딕"/>
               </a:rPr>
               <a:t>init → plan → apply 실전 흐름</a:t>
             </a:r>
@@ -10514,6 +10742,8 @@
                   <a:srgbClr val="0D9488"/>
                 </a:solidFill>
                 <a:latin typeface="맑은 고딕"/>
+                <a:ea typeface="맑은 고딕"/>
+                <a:cs typeface="맑은 고딕"/>
               </a:rPr>
               <a:t>●  </a:t>
             </a:r>
@@ -10523,6 +10753,8 @@
                   <a:srgbClr val="222733"/>
                 </a:solidFill>
                 <a:latin typeface="맑은 고딕"/>
+                <a:ea typeface="맑은 고딕"/>
+                <a:cs typeface="맑은 고딕"/>
               </a:rPr>
               <a:t>terraform init — main.tf에 명시된 docker Provider를 다운로드</a:t>
             </a:r>
@@ -10539,6 +10771,8 @@
                   <a:srgbClr val="0D9488"/>
                 </a:solidFill>
                 <a:latin typeface="맑은 고딕"/>
+                <a:ea typeface="맑은 고딕"/>
+                <a:cs typeface="맑은 고딕"/>
               </a:rPr>
               <a:t>●  </a:t>
             </a:r>
@@ -10548,6 +10782,8 @@
                   <a:srgbClr val="222733"/>
                 </a:solidFill>
                 <a:latin typeface="맑은 고딕"/>
+                <a:ea typeface="맑은 고딕"/>
+                <a:cs typeface="맑은 고딕"/>
               </a:rPr>
               <a:t>terraform plan — "docker_container.web을 새로 만들 예정"이라는 견적 확인</a:t>
             </a:r>
@@ -10564,6 +10800,8 @@
                   <a:srgbClr val="0D9488"/>
                 </a:solidFill>
                 <a:latin typeface="맑은 고딕"/>
+                <a:ea typeface="맑은 고딕"/>
+                <a:cs typeface="맑은 고딕"/>
               </a:rPr>
               <a:t>●  </a:t>
             </a:r>
@@ -10573,6 +10811,8 @@
                   <a:srgbClr val="222733"/>
                 </a:solidFill>
                 <a:latin typeface="맑은 고딕"/>
+                <a:ea typeface="맑은 고딕"/>
+                <a:cs typeface="맑은 고딕"/>
               </a:rPr>
               <a:t>terraform apply -auto-approve — 실제로 컨테이너 생성</a:t>
             </a:r>
@@ -10589,6 +10829,8 @@
                   <a:srgbClr val="0D9488"/>
                 </a:solidFill>
                 <a:latin typeface="맑은 고딕"/>
+                <a:ea typeface="맑은 고딕"/>
+                <a:cs typeface="맑은 고딕"/>
               </a:rPr>
               <a:t>●  </a:t>
             </a:r>
@@ -10598,6 +10840,8 @@
                   <a:srgbClr val="222733"/>
                 </a:solidFill>
                 <a:latin typeface="맑은 고딕"/>
+                <a:ea typeface="맑은 고딕"/>
+                <a:cs typeface="맑은 고딕"/>
               </a:rPr>
               <a:t>docker ps 로 tf-nginx 컨테이너가 떠 있는지 확인</a:t>
             </a:r>
@@ -10633,6 +10877,8 @@
                   <a:srgbClr val="5B6373"/>
                 </a:solidFill>
                 <a:latin typeface="맑은 고딕"/>
+                <a:ea typeface="맑은 고딕"/>
+                <a:cs typeface="맑은 고딕"/>
               </a:rPr>
               <a:t>클라우드인프라관리  ·  9주차 2차시</a:t>
             </a:r>
@@ -10668,6 +10914,8 @@
                   <a:srgbClr val="5B6373"/>
                 </a:solidFill>
                 <a:latin typeface="맑은 고딕"/>
+                <a:ea typeface="맑은 고딕"/>
+                <a:cs typeface="맑은 고딕"/>
               </a:rPr>
               <a:t>09 / 13</a:t>
             </a:r>

--- a/class/cloud_infra_mgmt/09주차_Terraform_IaC기초/01_강의자료/2차시_Terraform설치와HCL문법.pptx
+++ b/class/cloud_infra_mgmt/09주차_Terraform_IaC기초/01_강의자료/2차시_Terraform설치와HCL문법.pptx
@@ -1330,6 +1330,16 @@
           <a:p>
             <a:r>
               <a:t>  sudo gpg --dearmor -o /usr/share/keyrings/hashicorp-archive-keyring.gpg</a:t>
+            </a:r>
+          </a:p>
+          <a:p>
+            <a:r>
+              <a:t>echo "deb [signed-by=/usr/share/keyrings/hashicorp-archive-keyring.gpg] https://apt.releases.hashicorp.com $(lsb_release -cs) main" | \</a:t>
+            </a:r>
+          </a:p>
+          <a:p>
+            <a:r>
+              <a:t>  sudo tee /etc/apt/sources.list.d/hashicorp.list</a:t>
             </a:r>
           </a:p>
           <a:p>
@@ -8847,6 +8857,24 @@
                 <a:cs typeface="맑은 고딕"/>
               </a:rPr>
               <a:t>wget -O- https://apt.releases.hashicorp.com/gpg | sudo gpg --dearmor -o /usr/share/keyrings/hashicorp-archive-keyring.gpg</a:t>
+            </a:r>
+          </a:p>
+          <a:p>
+            <a:pPr>
+              <a:lnSpc>
+                <a:spcPct val="149500"/>
+              </a:lnSpc>
+            </a:pPr>
+            <a:r>
+              <a:rPr sz="1700" b="1">
+                <a:solidFill>
+                  <a:srgbClr val="0D9488"/>
+                </a:solidFill>
+                <a:latin typeface="맑은 고딕"/>
+                <a:ea typeface="맑은 고딕"/>
+                <a:cs typeface="맑은 고딕"/>
+              </a:rPr>
+              <a:t>●  echo "deb [signed-by=/usr/share/keyrings/hashicorp-archive-keyring.gpg] https://apt.releases.hashicorp.com $(lsb_release -cs) main" | sudo tee /etc/apt/sources.list.d/hashicorp.list</a:t>
             </a:r>
           </a:p>
           <a:p>

--- a/class/cloud_infra_mgmt/09주차_Terraform_IaC기초/01_강의자료/2차시_Terraform설치와HCL문법.pptx
+++ b/class/cloud_infra_mgmt/09주차_Terraform_IaC기초/01_강의자료/2차시_Terraform설치와HCL문법.pptx
@@ -5820,18 +5820,7 @@
                 <a:ea typeface="맑은 고딕"/>
                 <a:cs typeface="맑은 고딕"/>
               </a:rPr>
-              <a:t>●  </a:t>
-            </a:r>
-            <a:r>
-              <a:rPr sz="1700" b="0">
-                <a:solidFill>
-                  <a:srgbClr val="222733"/>
-                </a:solidFill>
-                <a:latin typeface="맑은 고딕"/>
-                <a:ea typeface="맑은 고딕"/>
-                <a:cs typeface="맑은 고딕"/>
-              </a:rPr>
-              <a:t>개인 VM에서 Terraform 설치 명령어 그대로 실행 (04_템플릿코드에 스크립트 제공)</a:t>
+              <a:t>●  개인 VM에서 오늘 05번 슬라이드의 Terraform 설치 명령어 그대로 실행</a:t>
             </a:r>
           </a:p>
           <a:p>
